--- a/10-Knowledge-Products/KP1-GEA/videos/module_3/en/decks/KP1_M3_3.5_Deck_v0.2.pptx
+++ b/10-Knowledge-Products/KP1-GEA/videos/module_3/en/decks/KP1_M3_3.5_Deck_v0.2.pptx
@@ -14,14 +14,14 @@
     <p:handoutMasterId r:id="rId47"/>
   </p:handoutMasterIdLst>
   <p:sldIdLst>
-    <p:sldId id="2681" r:id="rId8"/>
-    <p:sldId id="2727" r:id="rId14"/>
-    <p:sldId id="2728" r:id="rId13"/>
-    <p:sldId id="2729" r:id="rId12"/>
-    <p:sldId id="2730" r:id="rId11"/>
     <p:sldId id="2731" r:id="rId10"/>
     <p:sldId id="2732" r:id="rId54"/>
     <p:sldId id="2733" r:id="rId55"/>
+    <p:sldId id="2734" r:id="rId56"/>
+    <p:sldId id="2735" r:id="rId57"/>
+    <p:sldId id="2736" r:id="rId58"/>
+    <p:sldId id="2737" r:id="rId59"/>
+    <p:sldId id="2738" r:id="rId60"/>
   </p:sldIdLst>
   <p:sldSz cx="12192000" cy="6858000"/>
   <p:notesSz cx="6858000" cy="9144000"/>
@@ -888,368 +888,6 @@
 </p:notesMaster>
 </file>
 
-<file path=ppt/notesSlides/notesSlide21.xml><?xml version="1.0" encoding="utf-8"?>
-<p:notes xmlns:a="http://schemas.openxmlformats.org/drawingml/2006/main" xmlns:p="http://schemas.openxmlformats.org/presentationml/2006/main" xmlns:r="http://schemas.openxmlformats.org/officeDocument/2006/relationships">
-  <p:cSld>
-    <p:spTree>
-      <p:nvGrpSpPr>
-        <p:cNvPr id="1" name=""/>
-        <p:cNvGrpSpPr/>
-        <p:nvPr/>
-      </p:nvGrpSpPr>
-      <p:grpSpPr>
-        <a:xfrm>
-          <a:off x="0" y="0"/>
-          <a:ext cx="0" cy="0"/>
-          <a:chOff x="0" y="0"/>
-          <a:chExt cx="0" cy="0"/>
-        </a:xfrm>
-      </p:grpSpPr>
-      <p:sp>
-        <p:nvSpPr>
-          <p:cNvPr id="2" name="Slide Image Placeholder 1"/>
-          <p:cNvSpPr>
-            <a:spLocks noGrp="1"/>
-          </p:cNvSpPr>
-          <p:nvPr>
-            <p:ph type="sldImg" idx="2"/>
-          </p:nvPr>
-        </p:nvSpPr>
-        <p:spPr/>
-      </p:sp>
-      <p:sp>
-        <p:nvSpPr>
-          <p:cNvPr id="3" name="Notes Placeholder 2"/>
-          <p:cNvSpPr>
-            <a:spLocks noGrp="1"/>
-          </p:cNvSpPr>
-          <p:nvPr>
-            <p:ph type="body" idx="3" sz="quarter"/>
-          </p:nvPr>
-        </p:nvSpPr>
-        <p:spPr/>
-        <p:txBody>
-          <a:bodyPr/>
-          <a:lstStyle/>
-          <a:p>
-            <a:r>
-              <a:t>Title card for standalone video 3.5. Content slides are identical to the corresponding section of the combined deck KP1_M3_Deck_v0.2.pptx; voice-over is in each slide’s notes.</a:t>
-            </a:r>
-          </a:p>
-        </p:txBody>
-      </p:sp>
-      <p:sp>
-        <p:nvSpPr>
-          <p:cNvPr id="4" name="Slide Number Placeholder 3"/>
-          <p:cNvSpPr>
-            <a:spLocks noGrp="1"/>
-          </p:cNvSpPr>
-          <p:nvPr>
-            <p:ph type="sldNum" idx="5" sz="quarter"/>
-          </p:nvPr>
-        </p:nvSpPr>
-        <p:spPr/>
-      </p:sp>
-    </p:spTree>
-  </p:cSld>
-  <p:clrMapOvr>
-    <a:masterClrMapping/>
-  </p:clrMapOvr>
-</p:notes>
-</file>
-
-<file path=ppt/notesSlides/notesSlide34.xml><?xml version="1.0" encoding="utf-8"?>
-<p:notes xmlns:a="http://schemas.openxmlformats.org/drawingml/2006/main" xmlns:p="http://schemas.openxmlformats.org/presentationml/2006/main" xmlns:r="http://schemas.openxmlformats.org/officeDocument/2006/relationships">
-  <p:cSld>
-    <p:spTree>
-      <p:nvGrpSpPr>
-        <p:cNvPr id="1" name=""/>
-        <p:cNvGrpSpPr/>
-        <p:nvPr/>
-      </p:nvGrpSpPr>
-      <p:grpSpPr>
-        <a:xfrm>
-          <a:off x="0" y="0"/>
-          <a:ext cx="0" cy="0"/>
-          <a:chOff x="0" y="0"/>
-          <a:chExt cx="0" cy="0"/>
-        </a:xfrm>
-      </p:grpSpPr>
-      <p:sp>
-        <p:nvSpPr>
-          <p:cNvPr id="2" name="Slide Image Placeholder 1"/>
-          <p:cNvSpPr>
-            <a:spLocks noGrp="1"/>
-          </p:cNvSpPr>
-          <p:nvPr>
-            <p:ph type="sldImg" idx="2"/>
-          </p:nvPr>
-        </p:nvSpPr>
-        <p:spPr/>
-      </p:sp>
-      <p:sp>
-        <p:nvSpPr>
-          <p:cNvPr id="3" name="Notes Placeholder 2"/>
-          <p:cNvSpPr>
-            <a:spLocks noGrp="1"/>
-          </p:cNvSpPr>
-          <p:nvPr>
-            <p:ph type="body" idx="3" sz="quarter"/>
-          </p:nvPr>
-        </p:nvSpPr>
-        <p:spPr/>
-        <p:txBody>
-          <a:bodyPr/>
-          <a:lstStyle/>
-          <a:p>
-            <a:r>
-              <a:t>VO, slide 1: A Board with authority needs something to do with it: the architecture review gate, where every significant new project passes through a short, consistent set of questions before it gets funded. This is where the architecture does its real work.</a:t>
-            </a:r>
-          </a:p>
-        </p:txBody>
-      </p:sp>
-      <p:sp>
-        <p:nvSpPr>
-          <p:cNvPr id="4" name="Slide Number Placeholder 3"/>
-          <p:cNvSpPr>
-            <a:spLocks noGrp="1"/>
-          </p:cNvSpPr>
-          <p:nvPr>
-            <p:ph type="sldNum" idx="5" sz="quarter"/>
-          </p:nvPr>
-        </p:nvSpPr>
-        <p:spPr/>
-      </p:sp>
-    </p:spTree>
-  </p:cSld>
-  <p:clrMapOvr>
-    <a:masterClrMapping/>
-  </p:clrMapOvr>
-</p:notes>
-</file>
-
-<file path=ppt/notesSlides/notesSlide35.xml><?xml version="1.0" encoding="utf-8"?>
-<p:notes xmlns:a="http://schemas.openxmlformats.org/drawingml/2006/main" xmlns:p="http://schemas.openxmlformats.org/presentationml/2006/main" xmlns:r="http://schemas.openxmlformats.org/officeDocument/2006/relationships">
-  <p:cSld>
-    <p:spTree>
-      <p:nvGrpSpPr>
-        <p:cNvPr id="1" name=""/>
-        <p:cNvGrpSpPr/>
-        <p:nvPr/>
-      </p:nvGrpSpPr>
-      <p:grpSpPr>
-        <a:xfrm>
-          <a:off x="0" y="0"/>
-          <a:ext cx="0" cy="0"/>
-          <a:chOff x="0" y="0"/>
-          <a:chExt cx="0" cy="0"/>
-        </a:xfrm>
-      </p:grpSpPr>
-      <p:sp>
-        <p:nvSpPr>
-          <p:cNvPr id="2" name="Slide Image Placeholder 1"/>
-          <p:cNvSpPr>
-            <a:spLocks noGrp="1"/>
-          </p:cNvSpPr>
-          <p:nvPr>
-            <p:ph type="sldImg" idx="2"/>
-          </p:nvPr>
-        </p:nvSpPr>
-        <p:spPr/>
-      </p:sp>
-      <p:sp>
-        <p:nvSpPr>
-          <p:cNvPr id="3" name="Notes Placeholder 2"/>
-          <p:cNvSpPr>
-            <a:spLocks noGrp="1"/>
-          </p:cNvSpPr>
-          <p:nvPr>
-            <p:ph type="body" idx="3" sz="quarter"/>
-          </p:nvPr>
-        </p:nvSpPr>
-        <p:spPr/>
-        <p:txBody>
-          <a:bodyPr/>
-          <a:lstStyle/>
-          <a:p>
-            <a:r>
-              <a:t>VO: The gate is a few questions, asked of every project, the same way every time. Does a shared building block already exist for what you want to build? What data domains will you touch, and do you consume the owning body's copy rather than make your own? Do you meet the architecture principles — security by design, once-only, the rest? What is your sourcing choice, and is it deliberate? Can you export your data in an open format? Five questions. Asked consistently. That consistency is what makes the gate fair and predictable, so projects prepare for it rather than resent it.</a:t>
-            </a:r>
-          </a:p>
-          <a:p/>
-          <a:p>
-            <a:r>
-              <a:t>Centrepiece of 3.5 — the gate drawn as one mechanism: proposal → the five questions → the Board rules → pass, or a time-boxed exception → the decision log. Reveal one question at a time, then hold the full flow on screen; the exception and log branches are what the next slides walk through.</a:t>
-            </a:r>
-          </a:p>
-        </p:txBody>
-      </p:sp>
-      <p:sp>
-        <p:nvSpPr>
-          <p:cNvPr id="4" name="Slide Number Placeholder 3"/>
-          <p:cNvSpPr>
-            <a:spLocks noGrp="1"/>
-          </p:cNvSpPr>
-          <p:nvPr>
-            <p:ph type="sldNum" idx="5" sz="quarter"/>
-          </p:nvPr>
-        </p:nvSpPr>
-        <p:spPr/>
-      </p:sp>
-    </p:spTree>
-  </p:cSld>
-  <p:clrMapOvr>
-    <a:masterClrMapping/>
-  </p:clrMapOvr>
-</p:notes>
-</file>
-
-<file path=ppt/notesSlides/notesSlide36.xml><?xml version="1.0" encoding="utf-8"?>
-<p:notes xmlns:a="http://schemas.openxmlformats.org/drawingml/2006/main" xmlns:p="http://schemas.openxmlformats.org/presentationml/2006/main" xmlns:r="http://schemas.openxmlformats.org/officeDocument/2006/relationships">
-  <p:cSld>
-    <p:spTree>
-      <p:nvGrpSpPr>
-        <p:cNvPr id="1" name=""/>
-        <p:cNvGrpSpPr/>
-        <p:nvPr/>
-      </p:nvGrpSpPr>
-      <p:grpSpPr>
-        <a:xfrm>
-          <a:off x="0" y="0"/>
-          <a:ext cx="0" cy="0"/>
-          <a:chOff x="0" y="0"/>
-          <a:chExt cx="0" cy="0"/>
-        </a:xfrm>
-      </p:grpSpPr>
-      <p:sp>
-        <p:nvSpPr>
-          <p:cNvPr id="2" name="Slide Image Placeholder 1"/>
-          <p:cNvSpPr>
-            <a:spLocks noGrp="1"/>
-          </p:cNvSpPr>
-          <p:nvPr>
-            <p:ph type="sldImg" idx="2"/>
-          </p:nvPr>
-        </p:nvSpPr>
-        <p:spPr/>
-      </p:sp>
-      <p:sp>
-        <p:nvSpPr>
-          <p:cNvPr id="3" name="Notes Placeholder 2"/>
-          <p:cNvSpPr>
-            <a:spLocks noGrp="1"/>
-          </p:cNvSpPr>
-          <p:nvPr>
-            <p:ph type="body" idx="3" sz="quarter"/>
-          </p:nvPr>
-        </p:nvSpPr>
-        <p:spPr/>
-        <p:txBody>
-          <a:bodyPr/>
-          <a:lstStyle/>
-          <a:p>
-            <a:r>
-              <a:t>VO: Here is why this gate matters more than any document. Inside a project, building your own is faster than reusing, so projects fragment — and no procurement rule can change that; only whole-of-government planning makes re-use rational. The gate is where that view meets the decision, while it can still be changed. When a project proposes to build what already exists as a shared block, the Board says: consume the shared one.</a:t>
-            </a:r>
-          </a:p>
-          <a:p/>
-          <a:p>
-            <a:r>
-              <a:t>The emotional peak of the module. This is the pivotal slide of 3.5 — let the closing line land before moving on.</a:t>
-            </a:r>
-          </a:p>
-        </p:txBody>
-      </p:sp>
-      <p:sp>
-        <p:nvSpPr>
-          <p:cNvPr id="4" name="Slide Number Placeholder 3"/>
-          <p:cNvSpPr>
-            <a:spLocks noGrp="1"/>
-          </p:cNvSpPr>
-          <p:nvPr>
-            <p:ph type="sldNum" idx="5" sz="quarter"/>
-          </p:nvPr>
-        </p:nvSpPr>
-        <p:spPr/>
-      </p:sp>
-    </p:spTree>
-  </p:cSld>
-  <p:clrMapOvr>
-    <a:masterClrMapping/>
-  </p:clrMapOvr>
-</p:notes>
-</file>
-
-<file path=ppt/notesSlides/notesSlide37.xml><?xml version="1.0" encoding="utf-8"?>
-<p:notes xmlns:a="http://schemas.openxmlformats.org/drawingml/2006/main" xmlns:p="http://schemas.openxmlformats.org/presentationml/2006/main" xmlns:r="http://schemas.openxmlformats.org/officeDocument/2006/relationships">
-  <p:cSld>
-    <p:spTree>
-      <p:nvGrpSpPr>
-        <p:cNvPr id="1" name=""/>
-        <p:cNvGrpSpPr/>
-        <p:nvPr/>
-      </p:nvGrpSpPr>
-      <p:grpSpPr>
-        <a:xfrm>
-          <a:off x="0" y="0"/>
-          <a:ext cx="0" cy="0"/>
-          <a:chOff x="0" y="0"/>
-          <a:chExt cx="0" cy="0"/>
-        </a:xfrm>
-      </p:grpSpPr>
-      <p:sp>
-        <p:nvSpPr>
-          <p:cNvPr id="2" name="Slide Image Placeholder 1"/>
-          <p:cNvSpPr>
-            <a:spLocks noGrp="1"/>
-          </p:cNvSpPr>
-          <p:nvPr>
-            <p:ph type="sldImg" idx="2"/>
-          </p:nvPr>
-        </p:nvSpPr>
-        <p:spPr/>
-      </p:sp>
-      <p:sp>
-        <p:nvSpPr>
-          <p:cNvPr id="3" name="Notes Placeholder 2"/>
-          <p:cNvSpPr>
-            <a:spLocks noGrp="1"/>
-          </p:cNvSpPr>
-          <p:nvPr>
-            <p:ph type="body" idx="3" sz="quarter"/>
-          </p:nvPr>
-        </p:nvSpPr>
-        <p:spPr/>
-        <p:txBody>
-          <a:bodyPr/>
-          <a:lstStyle/>
-          <a:p>
-            <a:r>
-              <a:t>VO: Sometimes the project is right. The shared identity platform genuinely cannot do what this project needs yet. So the gate is not a wall — it grants exceptions. But every exception is written down, with its reason, and given a sunset — a date when it is revisited. An exception without an expiry quietly becomes the permanent normal, and ten of them become the fragmentation you were trying to prevent. Grant exceptions honestly, record them, and make them temporary by default.</a:t>
-            </a:r>
-          </a:p>
-        </p:txBody>
-      </p:sp>
-      <p:sp>
-        <p:nvSpPr>
-          <p:cNvPr id="4" name="Slide Number Placeholder 3"/>
-          <p:cNvSpPr>
-            <a:spLocks noGrp="1"/>
-          </p:cNvSpPr>
-          <p:nvPr>
-            <p:ph type="sldNum" idx="5" sz="quarter"/>
-          </p:nvPr>
-        </p:nvSpPr>
-        <p:spPr/>
-      </p:sp>
-    </p:spTree>
-  </p:cSld>
-  <p:clrMapOvr>
-    <a:masterClrMapping/>
-  </p:clrMapOvr>
-</p:notes>
-</file>
-
 <file path=ppt/notesSlides/notesSlide38.xml><?xml version="1.0" encoding="utf-8"?>
 <p:notes xmlns:a="http://schemas.openxmlformats.org/drawingml/2006/main" xmlns:p="http://schemas.openxmlformats.org/presentationml/2006/main" xmlns:r="http://schemas.openxmlformats.org/officeDocument/2006/relationships">
   <p:cSld>
@@ -1295,7 +933,7 @@
           <a:lstStyle/>
           <a:p>
             <a:r>
-              <a:t>VO: Every decision the gate makes goes into the repository's decision log — what was decided, and why. This is the architecture's memory. Two years on, when someone asks why the Examination Authority is not allowed its own learner list, the answer is in the log, with the reasoning, not lost with the architect who has moved on. The decision log is also what makes the gate consistent: this project is treated the way the last similar one was, because the precedent is written down.</a:t>
+              <a:t>Title card — the cold open. The hosts name the module, the video number, the title and the single message on this slide; no scripted narration. Hold until the opener begins; the opener is narrated on the next slide.</a:t>
             </a:r>
           </a:p>
         </p:txBody>
@@ -1365,13 +1003,7 @@
           <a:lstStyle/>
           <a:p>
             <a:r>
-              <a:t>PRACTICE BOX (on-screen only — never read it, never paraphrase it, never point at it). It replaces the narrated handoff: this video ends on the recap and the Sources slide.</a:t>
-            </a:r>
-          </a:p>
-          <a:p/>
-          <a:p>
-            <a:r>
-              <a:t>VO: So build the gate. A few questions, asked of every project the same way. A clear ruling — consume the shared block, or a written, time-boxed exception. Every decision logged with its reason.</a:t>
+              <a:t>VO: A Board with authority needs something to do with it: the architecture review gate, where every significant new project passes through a short, consistent set of questions before it gets funded. This is where the architecture does its real work.</a:t>
             </a:r>
           </a:p>
         </p:txBody>
@@ -1397,6 +1029,374 @@
 </file>
 
 <file path=ppt/notesSlides/notesSlide40.xml><?xml version="1.0" encoding="utf-8"?>
+<p:notes xmlns:a="http://schemas.openxmlformats.org/drawingml/2006/main" xmlns:p="http://schemas.openxmlformats.org/presentationml/2006/main" xmlns:r="http://schemas.openxmlformats.org/officeDocument/2006/relationships">
+  <p:cSld>
+    <p:spTree>
+      <p:nvGrpSpPr>
+        <p:cNvPr id="1" name=""/>
+        <p:cNvGrpSpPr/>
+        <p:nvPr/>
+      </p:nvGrpSpPr>
+      <p:grpSpPr>
+        <a:xfrm>
+          <a:off x="0" y="0"/>
+          <a:ext cx="0" cy="0"/>
+          <a:chOff x="0" y="0"/>
+          <a:chExt cx="0" cy="0"/>
+        </a:xfrm>
+      </p:grpSpPr>
+      <p:sp>
+        <p:nvSpPr>
+          <p:cNvPr id="2" name="Slide Image Placeholder 1"/>
+          <p:cNvSpPr>
+            <a:spLocks noGrp="1"/>
+          </p:cNvSpPr>
+          <p:nvPr>
+            <p:ph type="sldImg" idx="2"/>
+          </p:nvPr>
+        </p:nvSpPr>
+        <p:spPr/>
+      </p:sp>
+      <p:sp>
+        <p:nvSpPr>
+          <p:cNvPr id="3" name="Notes Placeholder 2"/>
+          <p:cNvSpPr>
+            <a:spLocks noGrp="1"/>
+          </p:cNvSpPr>
+          <p:nvPr>
+            <p:ph type="body" idx="3" sz="quarter"/>
+          </p:nvPr>
+        </p:nvSpPr>
+        <p:spPr/>
+        <p:txBody>
+          <a:bodyPr/>
+          <a:lstStyle/>
+          <a:p>
+            <a:r>
+              <a:t>VO: The gate is a few questions, asked of every project, the same way every time. Does a shared building block already exist for what you want to build? What data domains will you touch, and do you consume the owning body's copy rather than make your own? Do you meet the architecture principles — security by design, once-only, the rest? What is your sourcing choice, and is it deliberate? Can you export your data in an open format? Five questions. Asked consistently. That consistency is what makes the gate fair and predictable, so projects prepare for it rather than resent it.</a:t>
+            </a:r>
+          </a:p>
+          <a:p/>
+          <a:p>
+            <a:r>
+              <a:t>Centrepiece of 3.5 — the gate drawn as one mechanism: proposal → the five questions → the Board rules → pass, or a time-boxed exception → the decision log. Reveal one question at a time, then hold the full flow on screen; the exception and log branches are what the next slides walk through.</a:t>
+            </a:r>
+          </a:p>
+        </p:txBody>
+      </p:sp>
+      <p:sp>
+        <p:nvSpPr>
+          <p:cNvPr id="4" name="Slide Number Placeholder 3"/>
+          <p:cNvSpPr>
+            <a:spLocks noGrp="1"/>
+          </p:cNvSpPr>
+          <p:nvPr>
+            <p:ph type="sldNum" idx="5" sz="quarter"/>
+          </p:nvPr>
+        </p:nvSpPr>
+        <p:spPr/>
+      </p:sp>
+    </p:spTree>
+  </p:cSld>
+  <p:clrMapOvr>
+    <a:masterClrMapping/>
+  </p:clrMapOvr>
+</p:notes>
+</file>
+
+<file path=ppt/notesSlides/notesSlide41.xml><?xml version="1.0" encoding="utf-8"?>
+<p:notes xmlns:a="http://schemas.openxmlformats.org/drawingml/2006/main" xmlns:p="http://schemas.openxmlformats.org/presentationml/2006/main" xmlns:r="http://schemas.openxmlformats.org/officeDocument/2006/relationships">
+  <p:cSld>
+    <p:spTree>
+      <p:nvGrpSpPr>
+        <p:cNvPr id="1" name=""/>
+        <p:cNvGrpSpPr/>
+        <p:nvPr/>
+      </p:nvGrpSpPr>
+      <p:grpSpPr>
+        <a:xfrm>
+          <a:off x="0" y="0"/>
+          <a:ext cx="0" cy="0"/>
+          <a:chOff x="0" y="0"/>
+          <a:chExt cx="0" cy="0"/>
+        </a:xfrm>
+      </p:grpSpPr>
+      <p:sp>
+        <p:nvSpPr>
+          <p:cNvPr id="2" name="Slide Image Placeholder 1"/>
+          <p:cNvSpPr>
+            <a:spLocks noGrp="1"/>
+          </p:cNvSpPr>
+          <p:nvPr>
+            <p:ph type="sldImg" idx="2"/>
+          </p:nvPr>
+        </p:nvSpPr>
+        <p:spPr/>
+      </p:sp>
+      <p:sp>
+        <p:nvSpPr>
+          <p:cNvPr id="3" name="Notes Placeholder 2"/>
+          <p:cNvSpPr>
+            <a:spLocks noGrp="1"/>
+          </p:cNvSpPr>
+          <p:nvPr>
+            <p:ph type="body" idx="3" sz="quarter"/>
+          </p:nvPr>
+        </p:nvSpPr>
+        <p:spPr/>
+        <p:txBody>
+          <a:bodyPr/>
+          <a:lstStyle/>
+          <a:p>
+            <a:r>
+              <a:t>VO: Here is why this gate matters more than any document. Inside a project, building your own is faster than reusing, so projects fragment — and no procurement rule can change that; only whole-of-government planning makes re-use rational. The gate is where that view meets the decision, while it can still be changed. When a project proposes to build what already exists as a shared block, the Board says: consume the shared one.</a:t>
+            </a:r>
+          </a:p>
+          <a:p/>
+          <a:p>
+            <a:r>
+              <a:t>The emotional peak of the module. This is the pivotal slide of 3.5 — let the closing line land before moving on.</a:t>
+            </a:r>
+          </a:p>
+        </p:txBody>
+      </p:sp>
+      <p:sp>
+        <p:nvSpPr>
+          <p:cNvPr id="4" name="Slide Number Placeholder 3"/>
+          <p:cNvSpPr>
+            <a:spLocks noGrp="1"/>
+          </p:cNvSpPr>
+          <p:nvPr>
+            <p:ph type="sldNum" idx="5" sz="quarter"/>
+          </p:nvPr>
+        </p:nvSpPr>
+        <p:spPr/>
+      </p:sp>
+    </p:spTree>
+  </p:cSld>
+  <p:clrMapOvr>
+    <a:masterClrMapping/>
+  </p:clrMapOvr>
+</p:notes>
+</file>
+
+<file path=ppt/notesSlides/notesSlide42.xml><?xml version="1.0" encoding="utf-8"?>
+<p:notes xmlns:a="http://schemas.openxmlformats.org/drawingml/2006/main" xmlns:p="http://schemas.openxmlformats.org/presentationml/2006/main" xmlns:r="http://schemas.openxmlformats.org/officeDocument/2006/relationships">
+  <p:cSld>
+    <p:spTree>
+      <p:nvGrpSpPr>
+        <p:cNvPr id="1" name=""/>
+        <p:cNvGrpSpPr/>
+        <p:nvPr/>
+      </p:nvGrpSpPr>
+      <p:grpSpPr>
+        <a:xfrm>
+          <a:off x="0" y="0"/>
+          <a:ext cx="0" cy="0"/>
+          <a:chOff x="0" y="0"/>
+          <a:chExt cx="0" cy="0"/>
+        </a:xfrm>
+      </p:grpSpPr>
+      <p:sp>
+        <p:nvSpPr>
+          <p:cNvPr id="2" name="Slide Image Placeholder 1"/>
+          <p:cNvSpPr>
+            <a:spLocks noGrp="1"/>
+          </p:cNvSpPr>
+          <p:nvPr>
+            <p:ph type="sldImg" idx="2"/>
+          </p:nvPr>
+        </p:nvSpPr>
+        <p:spPr/>
+      </p:sp>
+      <p:sp>
+        <p:nvSpPr>
+          <p:cNvPr id="3" name="Notes Placeholder 2"/>
+          <p:cNvSpPr>
+            <a:spLocks noGrp="1"/>
+          </p:cNvSpPr>
+          <p:nvPr>
+            <p:ph type="body" idx="3" sz="quarter"/>
+          </p:nvPr>
+        </p:nvSpPr>
+        <p:spPr/>
+        <p:txBody>
+          <a:bodyPr/>
+          <a:lstStyle/>
+          <a:p>
+            <a:r>
+              <a:t>VO: Sometimes the project is right. The shared identity platform genuinely cannot do what this project needs yet. So the gate is not a wall — it grants exceptions. But every exception is written down, with its reason, and given a sunset — a date when it is revisited. An exception without an expiry quietly becomes the permanent normal, and ten of them become the fragmentation you were trying to prevent. Grant exceptions honestly, record them, and make them temporary by default.</a:t>
+            </a:r>
+          </a:p>
+        </p:txBody>
+      </p:sp>
+      <p:sp>
+        <p:nvSpPr>
+          <p:cNvPr id="4" name="Slide Number Placeholder 3"/>
+          <p:cNvSpPr>
+            <a:spLocks noGrp="1"/>
+          </p:cNvSpPr>
+          <p:nvPr>
+            <p:ph type="sldNum" idx="5" sz="quarter"/>
+          </p:nvPr>
+        </p:nvSpPr>
+        <p:spPr/>
+      </p:sp>
+    </p:spTree>
+  </p:cSld>
+  <p:clrMapOvr>
+    <a:masterClrMapping/>
+  </p:clrMapOvr>
+</p:notes>
+</file>
+
+<file path=ppt/notesSlides/notesSlide43.xml><?xml version="1.0" encoding="utf-8"?>
+<p:notes xmlns:a="http://schemas.openxmlformats.org/drawingml/2006/main" xmlns:p="http://schemas.openxmlformats.org/presentationml/2006/main" xmlns:r="http://schemas.openxmlformats.org/officeDocument/2006/relationships">
+  <p:cSld>
+    <p:spTree>
+      <p:nvGrpSpPr>
+        <p:cNvPr id="1" name=""/>
+        <p:cNvGrpSpPr/>
+        <p:nvPr/>
+      </p:nvGrpSpPr>
+      <p:grpSpPr>
+        <a:xfrm>
+          <a:off x="0" y="0"/>
+          <a:ext cx="0" cy="0"/>
+          <a:chOff x="0" y="0"/>
+          <a:chExt cx="0" cy="0"/>
+        </a:xfrm>
+      </p:grpSpPr>
+      <p:sp>
+        <p:nvSpPr>
+          <p:cNvPr id="2" name="Slide Image Placeholder 1"/>
+          <p:cNvSpPr>
+            <a:spLocks noGrp="1"/>
+          </p:cNvSpPr>
+          <p:nvPr>
+            <p:ph type="sldImg" idx="2"/>
+          </p:nvPr>
+        </p:nvSpPr>
+        <p:spPr/>
+      </p:sp>
+      <p:sp>
+        <p:nvSpPr>
+          <p:cNvPr id="3" name="Notes Placeholder 2"/>
+          <p:cNvSpPr>
+            <a:spLocks noGrp="1"/>
+          </p:cNvSpPr>
+          <p:nvPr>
+            <p:ph type="body" idx="3" sz="quarter"/>
+          </p:nvPr>
+        </p:nvSpPr>
+        <p:spPr/>
+        <p:txBody>
+          <a:bodyPr/>
+          <a:lstStyle/>
+          <a:p>
+            <a:r>
+              <a:t>VO: Every decision the gate makes goes into the repository's decision log — what was decided, and why. This is the architecture's memory. Two years on, when someone asks why the Examination Authority is not allowed its own learner list, the answer is in the log, with the reasoning, not lost with the architect who has moved on. The decision log is also what makes the gate consistent: this project is treated the way the last similar one was, because the precedent is written down.</a:t>
+            </a:r>
+          </a:p>
+        </p:txBody>
+      </p:sp>
+      <p:sp>
+        <p:nvSpPr>
+          <p:cNvPr id="4" name="Slide Number Placeholder 3"/>
+          <p:cNvSpPr>
+            <a:spLocks noGrp="1"/>
+          </p:cNvSpPr>
+          <p:nvPr>
+            <p:ph type="sldNum" idx="5" sz="quarter"/>
+          </p:nvPr>
+        </p:nvSpPr>
+        <p:spPr/>
+      </p:sp>
+    </p:spTree>
+  </p:cSld>
+  <p:clrMapOvr>
+    <a:masterClrMapping/>
+  </p:clrMapOvr>
+</p:notes>
+</file>
+
+<file path=ppt/notesSlides/notesSlide44.xml><?xml version="1.0" encoding="utf-8"?>
+<p:notes xmlns:a="http://schemas.openxmlformats.org/drawingml/2006/main" xmlns:p="http://schemas.openxmlformats.org/presentationml/2006/main" xmlns:r="http://schemas.openxmlformats.org/officeDocument/2006/relationships">
+  <p:cSld>
+    <p:spTree>
+      <p:nvGrpSpPr>
+        <p:cNvPr id="1" name=""/>
+        <p:cNvGrpSpPr/>
+        <p:nvPr/>
+      </p:nvGrpSpPr>
+      <p:grpSpPr>
+        <a:xfrm>
+          <a:off x="0" y="0"/>
+          <a:ext cx="0" cy="0"/>
+          <a:chOff x="0" y="0"/>
+          <a:chExt cx="0" cy="0"/>
+        </a:xfrm>
+      </p:grpSpPr>
+      <p:sp>
+        <p:nvSpPr>
+          <p:cNvPr id="2" name="Slide Image Placeholder 1"/>
+          <p:cNvSpPr>
+            <a:spLocks noGrp="1"/>
+          </p:cNvSpPr>
+          <p:nvPr>
+            <p:ph type="sldImg" idx="2"/>
+          </p:nvPr>
+        </p:nvSpPr>
+        <p:spPr/>
+      </p:sp>
+      <p:sp>
+        <p:nvSpPr>
+          <p:cNvPr id="3" name="Notes Placeholder 2"/>
+          <p:cNvSpPr>
+            <a:spLocks noGrp="1"/>
+          </p:cNvSpPr>
+          <p:nvPr>
+            <p:ph type="body" idx="3" sz="quarter"/>
+          </p:nvPr>
+        </p:nvSpPr>
+        <p:spPr/>
+        <p:txBody>
+          <a:bodyPr/>
+          <a:lstStyle/>
+          <a:p>
+            <a:r>
+              <a:t>PRACTICE BOX (on-screen only — never read it, never paraphrase it, never point at it). It replaces the narrated handoff: this video ends on the recap and the Sources slide.</a:t>
+            </a:r>
+          </a:p>
+          <a:p/>
+          <a:p>
+            <a:r>
+              <a:t>VO: So build the gate. A few questions, asked of every project the same way. A clear ruling — consume the shared block, or a written, time-boxed exception. Every decision logged with its reason.</a:t>
+            </a:r>
+          </a:p>
+        </p:txBody>
+      </p:sp>
+      <p:sp>
+        <p:nvSpPr>
+          <p:cNvPr id="4" name="Slide Number Placeholder 3"/>
+          <p:cNvSpPr>
+            <a:spLocks noGrp="1"/>
+          </p:cNvSpPr>
+          <p:nvPr>
+            <p:ph type="sldNum" idx="5" sz="quarter"/>
+          </p:nvPr>
+        </p:nvSpPr>
+        <p:spPr/>
+      </p:sp>
+    </p:spTree>
+  </p:cSld>
+  <p:clrMapOvr>
+    <a:masterClrMapping/>
+  </p:clrMapOvr>
+</p:notes>
+</file>
+
+<file path=ppt/notesSlides/notesSlide45.xml><?xml version="1.0" encoding="utf-8"?>
 <p:notes xmlns:a="http://schemas.openxmlformats.org/drawingml/2006/main" xmlns:p="http://schemas.openxmlformats.org/presentationml/2006/main" xmlns:r="http://schemas.openxmlformats.org/officeDocument/2006/relationships">
   <p:cSld>
     <p:spTree>
@@ -11602,664 +11602,7 @@
 </p:sldMaster>
 </file>
 
-<file path=ppt/slides/slide1.xml><?xml version="1.0" encoding="utf-8"?>
-<p:sld xmlns:a="http://schemas.openxmlformats.org/drawingml/2006/main" xmlns:r="http://schemas.openxmlformats.org/officeDocument/2006/relationships" xmlns:p="http://schemas.openxmlformats.org/presentationml/2006/main">
-  <p:cSld>
-    <p:spTree>
-      <p:nvGrpSpPr>
-        <p:cNvPr id="1" name=""/>
-        <p:cNvGrpSpPr/>
-        <p:nvPr/>
-      </p:nvGrpSpPr>
-      <p:grpSpPr>
-        <a:xfrm>
-          <a:off x="0" y="0"/>
-          <a:ext cx="0" cy="0"/>
-          <a:chOff x="0" y="0"/>
-          <a:chExt cx="0" cy="0"/>
-        </a:xfrm>
-      </p:grpSpPr>
-      <p:cxnSp>
-        <p:nvCxnSpPr>
-          <p:cNvPr id="11" name="Straight Connector 10">
-            <a:extLst>
-              <a:ext uri="{FF2B5EF4-FFF2-40B4-BE49-F238E27FC236}">
-                <a16:creationId xmlns:a16="http://schemas.microsoft.com/office/drawing/2014/main" id="{D9AD66F2-F7C0-4D03-9150-D28F17AC561D}"/>
-              </a:ext>
-            </a:extLst>
-          </p:cNvPr>
-          <p:cNvCxnSpPr>
-            <a:cxnSpLocks/>
-          </p:cNvCxnSpPr>
-          <p:nvPr/>
-        </p:nvCxnSpPr>
-        <p:spPr>
-          <a:xfrm>
-            <a:off x="373021" y="2198718"/>
-            <a:ext cx="6843567" cy="0"/>
-          </a:xfrm>
-          <a:prstGeom prst="line">
-            <a:avLst/>
-          </a:prstGeom>
-          <a:ln w="12700">
-            <a:solidFill>
-              <a:srgbClr val="009CD6"/>
-            </a:solidFill>
-          </a:ln>
-        </p:spPr>
-        <p:style>
-          <a:lnRef idx="1">
-            <a:schemeClr val="accent1"/>
-          </a:lnRef>
-          <a:fillRef idx="0">
-            <a:schemeClr val="accent1"/>
-          </a:fillRef>
-          <a:effectRef idx="0">
-            <a:schemeClr val="accent1"/>
-          </a:effectRef>
-          <a:fontRef idx="minor">
-            <a:schemeClr val="tx1"/>
-          </a:fontRef>
-        </p:style>
-      </p:cxnSp>
-      <p:sp>
-        <p:nvSpPr>
-          <p:cNvPr id="12" name="Title 9">
-            <a:extLst>
-              <a:ext uri="{FF2B5EF4-FFF2-40B4-BE49-F238E27FC236}">
-                <a16:creationId xmlns:a16="http://schemas.microsoft.com/office/drawing/2014/main" id="{EEB08032-CE0E-4986-AEDF-A41026C0E8B9}"/>
-              </a:ext>
-            </a:extLst>
-          </p:cNvPr>
-          <p:cNvSpPr txBox="1">
-            <a:spLocks/>
-          </p:cNvSpPr>
-          <p:nvPr/>
-        </p:nvSpPr>
-        <p:spPr>
-          <a:xfrm>
-            <a:off x="237734" y="702833"/>
-            <a:ext cx="6432007" cy="1218817"/>
-          </a:xfrm>
-          <a:prstGeom prst="rect">
-            <a:avLst/>
-          </a:prstGeom>
-        </p:spPr>
-        <p:txBody>
-          <a:bodyPr anchor="b">
-            <a:noAutofit/>
-          </a:bodyPr>
-          <a:lstStyle>
-            <a:lvl1pPr algn="l" defTabSz="914400" rtl="0" eaLnBrk="1" latinLnBrk="0" hangingPunct="1">
-              <a:lnSpc>
-                <a:spcPct val="90000"/>
-              </a:lnSpc>
-              <a:spcBef>
-                <a:spcPct val="0"/>
-              </a:spcBef>
-              <a:buNone/>
-              <a:defRPr sz="4000" kern="1200">
-                <a:solidFill>
-                  <a:schemeClr val="bg1"/>
-                </a:solidFill>
-                <a:latin typeface="Arial" panose="020B0604020202020204" pitchFamily="34" charset="0"/>
-                <a:ea typeface="+mj-ea"/>
-                <a:cs typeface="Arial" panose="020B0604020202020204" pitchFamily="34" charset="0"/>
-              </a:defRPr>
-            </a:lvl1pPr>
-          </a:lstStyle>
-          <a:p>
-            <a:r>
-              <a:rPr sz="2400" b="1" i="0">
-                <a:solidFill>
-                  <a:srgbClr val="1A1A1A"/>
-                </a:solidFill>
-                <a:latin typeface="Arial"/>
-              </a:rPr>
-              <a:t>3.5 — Review projects against the architecture</a:t>
-            </a:r>
-          </a:p>
-        </p:txBody>
-      </p:sp>
-      <p:pic>
-        <p:nvPicPr>
-          <p:cNvPr id="7" name="Picture 6">
-            <a:extLst>
-              <a:ext uri="{FF2B5EF4-FFF2-40B4-BE49-F238E27FC236}">
-                <a16:creationId xmlns:a16="http://schemas.microsoft.com/office/drawing/2014/main" id="{A2066351-C569-4C4C-A096-308777FCDC32}"/>
-              </a:ext>
-            </a:extLst>
-          </p:cNvPr>
-          <p:cNvPicPr>
-            <a:picLocks noChangeAspect="1"/>
-          </p:cNvPicPr>
-          <p:nvPr/>
-        </p:nvPicPr>
-        <p:blipFill>
-          <a:blip r:embed="rId2">
-            <a:extLst>
-              <a:ext uri="{28A0092B-C50C-407E-A947-70E740481C1C}">
-                <a14:useLocalDpi xmlns:a14="http://schemas.microsoft.com/office/drawing/2010/main" val="0"/>
-              </a:ext>
-            </a:extLst>
-          </a:blip>
-          <a:srcRect t="20219" b="14729"/>
-          <a:stretch>
-            <a:fillRect/>
-          </a:stretch>
-        </p:blipFill>
-        <p:spPr>
-          <a:xfrm>
-            <a:off x="0" y="5620871"/>
-            <a:ext cx="1323975" cy="1218816"/>
-          </a:xfrm>
-          <a:prstGeom prst="rect">
-            <a:avLst/>
-          </a:prstGeom>
-        </p:spPr>
-      </p:pic>
-      <p:sp>
-        <p:nvSpPr>
-          <p:cNvPr id="14" name="Title 9">
-            <a:extLst>
-              <a:ext uri="{FF2B5EF4-FFF2-40B4-BE49-F238E27FC236}">
-                <a16:creationId xmlns:a16="http://schemas.microsoft.com/office/drawing/2014/main" id="{B5087B80-3EE4-1881-0130-ED58CA625092}"/>
-              </a:ext>
-            </a:extLst>
-          </p:cNvPr>
-          <p:cNvSpPr txBox="1">
-            <a:spLocks/>
-          </p:cNvSpPr>
-          <p:nvPr/>
-        </p:nvSpPr>
-        <p:spPr>
-          <a:xfrm>
-            <a:off x="284452" y="2475786"/>
-            <a:ext cx="6382893" cy="953213"/>
-          </a:xfrm>
-          <a:prstGeom prst="rect">
-            <a:avLst/>
-          </a:prstGeom>
-        </p:spPr>
-        <p:txBody>
-          <a:bodyPr anchor="t">
-            <a:noAutofit/>
-          </a:bodyPr>
-          <a:lstStyle>
-            <a:lvl1pPr algn="l" defTabSz="914400" rtl="0" eaLnBrk="1" latinLnBrk="0" hangingPunct="1">
-              <a:lnSpc>
-                <a:spcPct val="90000"/>
-              </a:lnSpc>
-              <a:spcBef>
-                <a:spcPct val="0"/>
-              </a:spcBef>
-              <a:buNone/>
-              <a:defRPr sz="4000" kern="1200">
-                <a:solidFill>
-                  <a:schemeClr val="bg1"/>
-                </a:solidFill>
-                <a:latin typeface="Arial" panose="020B0604020202020204" pitchFamily="34" charset="0"/>
-                <a:ea typeface="+mj-ea"/>
-                <a:cs typeface="Arial" panose="020B0604020202020204" pitchFamily="34" charset="0"/>
-              </a:defRPr>
-            </a:lvl1pPr>
-          </a:lstStyle>
-          <a:p>
-            <a:pPr marL="0" marR="0" lvl="0" indent="0" rtl="0">
-              <a:spcBef>
-                <a:spcPts val="600"/>
-              </a:spcBef>
-              <a:spcAft>
-                <a:spcPts val="0"/>
-              </a:spcAft>
-              <a:buNone/>
-            </a:pPr>
-            <a:r>
-              <a:rPr sz="1300" b="1" i="0">
-                <a:solidFill>
-                  <a:srgbClr val="006E96"/>
-                </a:solidFill>
-                <a:latin typeface="Arial"/>
-              </a:rPr>
-              <a:t>KP1 · Government Enterprise Architecture · Module 3 · Video 3.5</a:t>
-            </a:r>
-          </a:p>
-          <a:p>
-            <a:r>
-              <a:rPr sz="1200" b="0" i="1">
-                <a:solidFill>
-                  <a:srgbClr val="595959"/>
-                </a:solidFill>
-                <a:latin typeface="Arial"/>
-              </a:rPr>
-              <a:t>The architecture review gate — a short, consistent set of questions every project passes through before funding — is what turns principles and re-use from good intentions into the actual path of least resistance.</a:t>
-            </a:r>
-          </a:p>
-        </p:txBody>
-      </p:sp>
-      <p:sp>
-        <p:nvSpPr>
-          <p:cNvPr id="17" name="Title 9">
-            <a:extLst>
-              <a:ext uri="{FF2B5EF4-FFF2-40B4-BE49-F238E27FC236}">
-                <a16:creationId xmlns:a16="http://schemas.microsoft.com/office/drawing/2014/main" id="{5E8796F7-DD26-D250-5E97-B38B22298E72}"/>
-              </a:ext>
-            </a:extLst>
-          </p:cNvPr>
-          <p:cNvSpPr txBox="1">
-            <a:spLocks/>
-          </p:cNvSpPr>
-          <p:nvPr/>
-        </p:nvSpPr>
-        <p:spPr>
-          <a:xfrm>
-            <a:off x="284452" y="4363897"/>
-            <a:ext cx="6382893" cy="953213"/>
-          </a:xfrm>
-          <a:prstGeom prst="rect">
-            <a:avLst/>
-          </a:prstGeom>
-        </p:spPr>
-        <p:txBody>
-          <a:bodyPr anchor="t">
-            <a:noAutofit/>
-          </a:bodyPr>
-          <a:lstStyle>
-            <a:lvl1pPr algn="l" defTabSz="914400" rtl="0" eaLnBrk="1" latinLnBrk="0" hangingPunct="1">
-              <a:lnSpc>
-                <a:spcPct val="90000"/>
-              </a:lnSpc>
-              <a:spcBef>
-                <a:spcPct val="0"/>
-              </a:spcBef>
-              <a:buNone/>
-              <a:defRPr sz="4000" kern="1200">
-                <a:solidFill>
-                  <a:schemeClr val="bg1"/>
-                </a:solidFill>
-                <a:latin typeface="Arial" panose="020B0604020202020204" pitchFamily="34" charset="0"/>
-                <a:ea typeface="+mj-ea"/>
-                <a:cs typeface="Arial" panose="020B0604020202020204" pitchFamily="34" charset="0"/>
-              </a:defRPr>
-            </a:lvl1pPr>
-          </a:lstStyle>
-          <a:p>
-            <a:pPr marL="0" marR="0" lvl="0" indent="0" rtl="0">
-              <a:spcBef>
-                <a:spcPts val="600"/>
-              </a:spcBef>
-              <a:spcAft>
-                <a:spcPts val="1200"/>
-              </a:spcAft>
-              <a:buNone/>
-            </a:pPr>
-            <a:r>
-              <a:rPr sz="1400" b="1" i="0">
-                <a:solidFill>
-                  <a:srgbClr val="1A1A1A"/>
-                </a:solidFill>
-                <a:latin typeface="Arial"/>
-              </a:rPr>
-              <a:t>Target audience: </a:t>
-            </a:r>
-            <a:r>
-              <a:rPr sz="1400" b="0" i="0">
-                <a:solidFill>
-                  <a:srgbClr val="1A1A1A"/>
-                </a:solidFill>
-                <a:latin typeface="Arial"/>
-              </a:rPr>
-              <a:t>Chief architect · senior architect · sector ICT lead</a:t>
-            </a:r>
-          </a:p>
-        </p:txBody>
-      </p:sp>
-      <p:sp>
-        <p:nvSpPr>
-          <p:cNvPr id="18" name="Rectangle 17"/>
-          <p:cNvSpPr/>
-          <p:nvPr/>
-        </p:nvSpPr>
-        <p:spPr>
-          <a:xfrm>
-            <a:off x="7022592" y="0"/>
-            <a:ext cx="5169103" cy="6858000"/>
-          </a:xfrm>
-          <a:prstGeom prst="rect">
-            <a:avLst/>
-          </a:prstGeom>
-          <a:solidFill>
-            <a:srgbClr val="009CD6"/>
-          </a:solidFill>
-          <a:ln>
-            <a:noFill/>
-          </a:ln>
-          <a:effectLst/>
-        </p:spPr>
-        <p:style>
-          <a:lnRef idx="1">
-            <a:schemeClr val="accent1"/>
-          </a:lnRef>
-          <a:fillRef idx="3">
-            <a:schemeClr val="accent1"/>
-          </a:fillRef>
-          <a:effectRef idx="2">
-            <a:schemeClr val="accent1"/>
-          </a:effectRef>
-          <a:fontRef idx="minor">
-            <a:schemeClr val="lt1"/>
-          </a:fontRef>
-        </p:style>
-        <p:txBody>
-          <a:bodyPr rtlCol="0" anchor="ctr"/>
-          <a:lstStyle/>
-          <a:p>
-            <a:pPr algn="ctr"/>
-          </a:p>
-        </p:txBody>
-      </p:sp>
-      <p:sp>
-        <p:nvSpPr>
-          <p:cNvPr id="19" name="TextBox 18"/>
-          <p:cNvSpPr txBox="1"/>
-          <p:nvPr/>
-        </p:nvSpPr>
-        <p:spPr>
-          <a:xfrm>
-            <a:off x="7452360" y="457200"/>
-            <a:ext cx="4297680" cy="457200"/>
-          </a:xfrm>
-          <a:prstGeom prst="rect">
-            <a:avLst/>
-          </a:prstGeom>
-          <a:noFill/>
-        </p:spPr>
-        <p:txBody>
-          <a:bodyPr wrap="square">
-            <a:spAutoFit/>
-          </a:bodyPr>
-          <a:lstStyle/>
-          <a:p>
-            <a:r>
-              <a:rPr sz="1100" b="1" i="0">
-                <a:solidFill>
-                  <a:srgbClr val="E5F5FB"/>
-                </a:solidFill>
-                <a:latin typeface="Arial"/>
-              </a:rPr>
-              <a:t>THE PRACTICE THIS MODULE STANDS UP</a:t>
-            </a:r>
-          </a:p>
-        </p:txBody>
-      </p:sp>
-      <p:sp>
-        <p:nvSpPr>
-          <p:cNvPr id="20" name="Rounded Rectangle 19"/>
-          <p:cNvSpPr/>
-          <p:nvPr/>
-        </p:nvSpPr>
-        <p:spPr>
-          <a:xfrm>
-            <a:off x="7452360" y="960120"/>
-            <a:ext cx="3840480" cy="658368"/>
-          </a:xfrm>
-          <a:prstGeom prst="roundRect">
-            <a:avLst>
-              <a:gd name="adj" fmla="val 14000"/>
-            </a:avLst>
-          </a:prstGeom>
-          <a:solidFill>
-            <a:srgbClr val="FFFFFF"/>
-          </a:solidFill>
-          <a:ln>
-            <a:noFill/>
-          </a:ln>
-          <a:effectLst/>
-        </p:spPr>
-        <p:style>
-          <a:lnRef idx="1">
-            <a:schemeClr val="accent1"/>
-          </a:lnRef>
-          <a:fillRef idx="3">
-            <a:schemeClr val="accent1"/>
-          </a:fillRef>
-          <a:effectRef idx="2">
-            <a:schemeClr val="accent1"/>
-          </a:effectRef>
-          <a:fontRef idx="minor">
-            <a:schemeClr val="lt1"/>
-          </a:fontRef>
-        </p:style>
-        <p:txBody>
-          <a:bodyPr rtlCol="0" anchor="ctr" lIns="164592" wrap="square"/>
-          <a:lstStyle/>
-          <a:p>
-            <a:pPr algn="ctr"/>
-            <a:r>
-              <a:rPr sz="1500" b="1" i="0">
-                <a:solidFill>
-                  <a:srgbClr val="1A1A1A"/>
-                </a:solidFill>
-                <a:latin typeface="Arial"/>
-              </a:rPr>
-              <a:t>Repository — where the architecture lives</a:t>
-            </a:r>
-          </a:p>
-        </p:txBody>
-      </p:sp>
-      <p:sp>
-        <p:nvSpPr>
-          <p:cNvPr id="21" name="Rounded Rectangle 20"/>
-          <p:cNvSpPr/>
-          <p:nvPr/>
-        </p:nvSpPr>
-        <p:spPr>
-          <a:xfrm>
-            <a:off x="7452360" y="1892808"/>
-            <a:ext cx="3840480" cy="658368"/>
-          </a:xfrm>
-          <a:prstGeom prst="roundRect">
-            <a:avLst>
-              <a:gd name="adj" fmla="val 14000"/>
-            </a:avLst>
-          </a:prstGeom>
-          <a:solidFill>
-            <a:srgbClr val="FFFFFF"/>
-          </a:solidFill>
-          <a:ln>
-            <a:noFill/>
-          </a:ln>
-          <a:effectLst/>
-        </p:spPr>
-        <p:style>
-          <a:lnRef idx="1">
-            <a:schemeClr val="accent1"/>
-          </a:lnRef>
-          <a:fillRef idx="3">
-            <a:schemeClr val="accent1"/>
-          </a:fillRef>
-          <a:effectRef idx="2">
-            <a:schemeClr val="accent1"/>
-          </a:effectRef>
-          <a:fontRef idx="minor">
-            <a:schemeClr val="lt1"/>
-          </a:fontRef>
-        </p:style>
-        <p:txBody>
-          <a:bodyPr rtlCol="0" anchor="ctr" lIns="164592" wrap="square"/>
-          <a:lstStyle/>
-          <a:p>
-            <a:pPr algn="ctr"/>
-            <a:r>
-              <a:rPr sz="1500" b="1" i="0">
-                <a:solidFill>
-                  <a:srgbClr val="1A1A1A"/>
-                </a:solidFill>
-                <a:latin typeface="Arial"/>
-              </a:rPr>
-              <a:t>Tooling — chosen without lock-in</a:t>
-            </a:r>
-          </a:p>
-        </p:txBody>
-      </p:sp>
-      <p:sp>
-        <p:nvSpPr>
-          <p:cNvPr id="22" name="Rounded Rectangle 21"/>
-          <p:cNvSpPr/>
-          <p:nvPr/>
-        </p:nvSpPr>
-        <p:spPr>
-          <a:xfrm>
-            <a:off x="7452360" y="2825496"/>
-            <a:ext cx="3840480" cy="658368"/>
-          </a:xfrm>
-          <a:prstGeom prst="roundRect">
-            <a:avLst>
-              <a:gd name="adj" fmla="val 14000"/>
-            </a:avLst>
-          </a:prstGeom>
-          <a:solidFill>
-            <a:srgbClr val="FFFFFF"/>
-          </a:solidFill>
-          <a:ln>
-            <a:noFill/>
-          </a:ln>
-          <a:effectLst/>
-        </p:spPr>
-        <p:style>
-          <a:lnRef idx="1">
-            <a:schemeClr val="accent1"/>
-          </a:lnRef>
-          <a:fillRef idx="3">
-            <a:schemeClr val="accent1"/>
-          </a:fillRef>
-          <a:effectRef idx="2">
-            <a:schemeClr val="accent1"/>
-          </a:effectRef>
-          <a:fontRef idx="minor">
-            <a:schemeClr val="lt1"/>
-          </a:fontRef>
-        </p:style>
-        <p:txBody>
-          <a:bodyPr rtlCol="0" anchor="ctr" lIns="164592" wrap="square"/>
-          <a:lstStyle/>
-          <a:p>
-            <a:pPr algn="ctr"/>
-            <a:r>
-              <a:rPr sz="1500" b="1" i="0">
-                <a:solidFill>
-                  <a:srgbClr val="1A1A1A"/>
-                </a:solidFill>
-                <a:latin typeface="Arial"/>
-              </a:rPr>
-              <a:t>Governance — a Board and a gate</a:t>
-            </a:r>
-          </a:p>
-        </p:txBody>
-      </p:sp>
-      <p:sp>
-        <p:nvSpPr>
-          <p:cNvPr id="23" name="Rounded Rectangle 22"/>
-          <p:cNvSpPr/>
-          <p:nvPr/>
-        </p:nvSpPr>
-        <p:spPr>
-          <a:xfrm>
-            <a:off x="7452360" y="3758184"/>
-            <a:ext cx="3840480" cy="658368"/>
-          </a:xfrm>
-          <a:prstGeom prst="roundRect">
-            <a:avLst>
-              <a:gd name="adj" fmla="val 14000"/>
-            </a:avLst>
-          </a:prstGeom>
-          <a:solidFill>
-            <a:srgbClr val="006E96"/>
-          </a:solidFill>
-          <a:ln>
-            <a:noFill/>
-          </a:ln>
-          <a:effectLst/>
-        </p:spPr>
-        <p:style>
-          <a:lnRef idx="1">
-            <a:schemeClr val="accent1"/>
-          </a:lnRef>
-          <a:fillRef idx="3">
-            <a:schemeClr val="accent1"/>
-          </a:fillRef>
-          <a:effectRef idx="2">
-            <a:schemeClr val="accent1"/>
-          </a:effectRef>
-          <a:fontRef idx="minor">
-            <a:schemeClr val="lt1"/>
-          </a:fontRef>
-        </p:style>
-        <p:txBody>
-          <a:bodyPr rtlCol="0" anchor="ctr" lIns="164592" wrap="square"/>
-          <a:lstStyle/>
-          <a:p>
-            <a:pPr algn="ctr"/>
-            <a:r>
-              <a:rPr sz="1500" b="1" i="0">
-                <a:solidFill>
-                  <a:srgbClr val="FFFFFF"/>
-                </a:solidFill>
-                <a:latin typeface="Arial"/>
-              </a:rPr>
-              <a:t>Sustainment — alive past year two</a:t>
-            </a:r>
-          </a:p>
-        </p:txBody>
-      </p:sp>
-      <p:sp>
-        <p:nvSpPr>
-          <p:cNvPr id="24" name="TextBox 23"/>
-          <p:cNvSpPr txBox="1"/>
-          <p:nvPr/>
-        </p:nvSpPr>
-        <p:spPr>
-          <a:xfrm>
-            <a:off x="7452360" y="5806440"/>
-            <a:ext cx="4297680" cy="731520"/>
-          </a:xfrm>
-          <a:prstGeom prst="rect">
-            <a:avLst/>
-          </a:prstGeom>
-          <a:noFill/>
-        </p:spPr>
-        <p:txBody>
-          <a:bodyPr wrap="square">
-            <a:spAutoFit/>
-          </a:bodyPr>
-          <a:lstStyle/>
-          <a:p>
-            <a:r>
-              <a:rPr sz="1200" b="0" i="0">
-                <a:solidFill>
-                  <a:srgbClr val="FFFFFF"/>
-                </a:solidFill>
-                <a:latin typeface="Arial"/>
-              </a:rPr>
-              <a:t>5 gate questions · 4 health metrics · 4 ways a practice fades</a:t>
-            </a:r>
-          </a:p>
-        </p:txBody>
-      </p:sp>
-    </p:spTree>
-    <p:extLst>
-      <p:ext uri="{BB962C8B-B14F-4D97-AF65-F5344CB8AC3E}">
-        <p14:creationId xmlns:p14="http://schemas.microsoft.com/office/powerpoint/2010/main" val="1196800265"/>
-      </p:ext>
-    </p:extLst>
-  </p:cSld>
-  <p:clrMapOvr>
-    <a:masterClrMapping/>
-  </p:clrMapOvr>
-</p:sld>
-</file>
-
-<file path=ppt/slides/slide34.xml><?xml version="1.0" encoding="utf-8"?>
+<file path=ppt/slides/slide38.xml><?xml version="1.0" encoding="utf-8"?>
 <p:sld xmlns:a="http://schemas.openxmlformats.org/drawingml/2006/main" xmlns:p="http://schemas.openxmlformats.org/presentationml/2006/main" xmlns:r="http://schemas.openxmlformats.org/officeDocument/2006/relationships">
   <p:cSld>
     <p:spTree>
@@ -12447,7 +11790,217 @@
 </p:sld>
 </file>
 
-<file path=ppt/slides/slide35.xml><?xml version="1.0" encoding="utf-8"?>
+<file path=ppt/slides/slide39.xml><?xml version="1.0" encoding="utf-8"?>
+<p:sld xmlns:a="http://schemas.openxmlformats.org/drawingml/2006/main" xmlns:p="http://schemas.openxmlformats.org/presentationml/2006/main" xmlns:r="http://schemas.openxmlformats.org/officeDocument/2006/relationships">
+  <p:cSld>
+    <p:spTree>
+      <p:nvGrpSpPr>
+        <p:cNvPr id="1" name=""/>
+        <p:cNvGrpSpPr/>
+        <p:nvPr/>
+      </p:nvGrpSpPr>
+      <p:grpSpPr/>
+      <p:sp>
+        <p:nvSpPr>
+          <p:cNvPr id="2" name="TextBox 1"/>
+          <p:cNvSpPr txBox="1"/>
+          <p:nvPr/>
+        </p:nvSpPr>
+        <p:spPr>
+          <a:xfrm>
+            <a:off x="1005840" y="1325880"/>
+            <a:ext cx="5486400" cy="365760"/>
+          </a:xfrm>
+          <a:prstGeom prst="rect">
+            <a:avLst/>
+          </a:prstGeom>
+          <a:noFill/>
+        </p:spPr>
+        <p:txBody>
+          <a:bodyPr wrap="square">
+            <a:spAutoFit/>
+          </a:bodyPr>
+          <a:lstStyle/>
+          <a:p>
+            <a:r>
+              <a:rPr sz="1200" b="1" i="0">
+                <a:solidFill>
+                  <a:srgbClr val="006E96"/>
+                </a:solidFill>
+                <a:latin typeface="Arial"/>
+              </a:rPr>
+              <a:t>WHERE WE START</a:t>
+            </a:r>
+          </a:p>
+        </p:txBody>
+      </p:sp>
+      <p:sp>
+        <p:nvSpPr>
+          <p:cNvPr id="3" name="TextBox 2"/>
+          <p:cNvSpPr txBox="1"/>
+          <p:nvPr/>
+        </p:nvSpPr>
+        <p:spPr>
+          <a:xfrm>
+            <a:off x="1005840" y="1783080"/>
+            <a:ext cx="10149840" cy="1737360"/>
+          </a:xfrm>
+          <a:prstGeom prst="rect">
+            <a:avLst/>
+          </a:prstGeom>
+          <a:noFill/>
+        </p:spPr>
+        <p:txBody>
+          <a:bodyPr wrap="square">
+            <a:spAutoFit/>
+          </a:bodyPr>
+          <a:lstStyle/>
+          <a:p>
+            <a:r>
+              <a:rPr sz="3000" b="1" i="0">
+                <a:solidFill>
+                  <a:srgbClr val="1A1A1A"/>
+                </a:solidFill>
+                <a:latin typeface="Arial"/>
+              </a:rPr>
+              <a:t>A Board with authority needs something to do with it.</a:t>
+            </a:r>
+          </a:p>
+        </p:txBody>
+      </p:sp>
+      <p:sp>
+        <p:nvSpPr>
+          <p:cNvPr id="4" name="TextBox 3"/>
+          <p:cNvSpPr txBox="1"/>
+          <p:nvPr/>
+        </p:nvSpPr>
+        <p:spPr>
+          <a:xfrm>
+            <a:off x="1005840" y="3611880"/>
+            <a:ext cx="10149840" cy="2377440"/>
+          </a:xfrm>
+          <a:prstGeom prst="rect">
+            <a:avLst/>
+          </a:prstGeom>
+          <a:noFill/>
+        </p:spPr>
+        <p:txBody>
+          <a:bodyPr wrap="square">
+            <a:spAutoFit/>
+          </a:bodyPr>
+          <a:lstStyle/>
+          <a:p>
+            <a:pPr>
+              <a:spcAft>
+                <a:spcPts val="800"/>
+              </a:spcAft>
+            </a:pPr>
+            <a:r>
+              <a:rPr sz="1700" b="0" i="0">
+                <a:solidFill>
+                  <a:srgbClr val="595959"/>
+                </a:solidFill>
+                <a:latin typeface="Arial"/>
+              </a:rPr>
+              <a:t>The architecture review gate: every significant new project passes a short, consistent set of questions before it gets funded.</a:t>
+            </a:r>
+          </a:p>
+          <a:p>
+            <a:pPr>
+              <a:spcAft>
+                <a:spcPts val="800"/>
+              </a:spcAft>
+            </a:pPr>
+            <a:r>
+              <a:rPr sz="1700" b="0" i="0">
+                <a:solidFill>
+                  <a:srgbClr val="595959"/>
+                </a:solidFill>
+                <a:latin typeface="Arial"/>
+              </a:rPr>
+              <a:t>This is where the architecture does its real work.</a:t>
+            </a:r>
+          </a:p>
+        </p:txBody>
+      </p:sp>
+      <p:sp>
+        <p:nvSpPr>
+          <p:cNvPr id="5" name="TextBox 4"/>
+          <p:cNvSpPr txBox="1"/>
+          <p:nvPr/>
+        </p:nvSpPr>
+        <p:spPr>
+          <a:xfrm>
+            <a:off x="457200" y="6473952"/>
+            <a:ext cx="7772400" cy="292608"/>
+          </a:xfrm>
+          <a:prstGeom prst="rect">
+            <a:avLst/>
+          </a:prstGeom>
+          <a:noFill/>
+        </p:spPr>
+        <p:txBody>
+          <a:bodyPr wrap="square">
+            <a:spAutoFit/>
+          </a:bodyPr>
+          <a:lstStyle/>
+          <a:p>
+            <a:r>
+              <a:rPr sz="900" b="0" i="0">
+                <a:solidFill>
+                  <a:srgbClr val="595959"/>
+                </a:solidFill>
+                <a:latin typeface="Arial"/>
+              </a:rPr>
+              <a:t>3.5 · Review projects against the architecture</a:t>
+            </a:r>
+          </a:p>
+        </p:txBody>
+      </p:sp>
+      <p:sp>
+        <p:nvSpPr>
+          <p:cNvPr id="6" name="TextBox 5"/>
+          <p:cNvSpPr txBox="1"/>
+          <p:nvPr/>
+        </p:nvSpPr>
+        <p:spPr>
+          <a:xfrm>
+            <a:off x="10058400" y="6473952"/>
+            <a:ext cx="1673352" cy="292608"/>
+          </a:xfrm>
+          <a:prstGeom prst="rect">
+            <a:avLst/>
+          </a:prstGeom>
+          <a:noFill/>
+        </p:spPr>
+        <p:txBody>
+          <a:bodyPr wrap="square">
+            <a:spAutoFit/>
+          </a:bodyPr>
+          <a:lstStyle/>
+          <a:p>
+            <a:pPr algn="r"/>
+            <a:r>
+              <a:rPr sz="900" b="0" i="0">
+                <a:solidFill>
+                  <a:srgbClr val="595959"/>
+                </a:solidFill>
+                <a:latin typeface="Arial"/>
+              </a:rPr>
+              <a:t>www.itu.int</a:t>
+            </a:r>
+          </a:p>
+        </p:txBody>
+      </p:sp>
+    </p:spTree>
+  </p:cSld>
+  <p:clrMapOvr>
+    <a:masterClrMapping/>
+  </p:clrMapOvr>
+</p:sld>
+</file>
+
+<file path=ppt/slides/slide40.xml><?xml version="1.0" encoding="utf-8"?>
 <p:sld xmlns:a="http://schemas.openxmlformats.org/drawingml/2006/main" xmlns:p="http://schemas.openxmlformats.org/presentationml/2006/main" xmlns:r="http://schemas.openxmlformats.org/officeDocument/2006/relationships">
   <p:cSld>
     <p:spTree>
@@ -13707,7 +13260,7 @@
 </p:sld>
 </file>
 
-<file path=ppt/slides/slide36.xml><?xml version="1.0" encoding="utf-8"?>
+<file path=ppt/slides/slide41.xml><?xml version="1.0" encoding="utf-8"?>
 <p:sld xmlns:a="http://schemas.openxmlformats.org/drawingml/2006/main" xmlns:p="http://schemas.openxmlformats.org/presentationml/2006/main" xmlns:r="http://schemas.openxmlformats.org/officeDocument/2006/relationships">
   <p:cSld>
     <p:spTree>
@@ -13977,7 +13530,7 @@
 </p:sld>
 </file>
 
-<file path=ppt/slides/slide37.xml><?xml version="1.0" encoding="utf-8"?>
+<file path=ppt/slides/slide42.xml><?xml version="1.0" encoding="utf-8"?>
 <p:sld xmlns:a="http://schemas.openxmlformats.org/drawingml/2006/main" xmlns:p="http://schemas.openxmlformats.org/presentationml/2006/main" xmlns:r="http://schemas.openxmlformats.org/officeDocument/2006/relationships">
   <p:cSld>
     <p:spTree>
@@ -14247,7 +13800,7 @@
 </p:sld>
 </file>
 
-<file path=ppt/slides/slide38.xml><?xml version="1.0" encoding="utf-8"?>
+<file path=ppt/slides/slide43.xml><?xml version="1.0" encoding="utf-8"?>
 <p:sld xmlns:a="http://schemas.openxmlformats.org/drawingml/2006/main" xmlns:p="http://schemas.openxmlformats.org/presentationml/2006/main" xmlns:r="http://schemas.openxmlformats.org/officeDocument/2006/relationships">
   <p:cSld>
     <p:spTree>
@@ -14517,7 +14070,7 @@
 </p:sld>
 </file>
 
-<file path=ppt/slides/slide39.xml><?xml version="1.0" encoding="utf-8"?>
+<file path=ppt/slides/slide44.xml><?xml version="1.0" encoding="utf-8"?>
 <p:sld xmlns:a="http://schemas.openxmlformats.org/drawingml/2006/main" xmlns:p="http://schemas.openxmlformats.org/presentationml/2006/main" xmlns:r="http://schemas.openxmlformats.org/officeDocument/2006/relationships">
   <p:cSld>
     <p:spTree>
@@ -14760,7 +14313,7 @@
 </p:sld>
 </file>
 
-<file path=ppt/slides/slide40.xml><?xml version="1.0" encoding="utf-8"?>
+<file path=ppt/slides/slide45.xml><?xml version="1.0" encoding="utf-8"?>
 <p:sld xmlns:a="http://schemas.openxmlformats.org/drawingml/2006/main" xmlns:p="http://schemas.openxmlformats.org/presentationml/2006/main" xmlns:r="http://schemas.openxmlformats.org/officeDocument/2006/relationships">
   <p:cSld>
     <p:spTree>

--- a/10-Knowledge-Products/KP1-GEA/videos/module_3/en/decks/KP1_M3_3.5_Deck_v0.2.pptx
+++ b/10-Knowledge-Products/KP1-GEA/videos/module_3/en/decks/KP1_M3_3.5_Deck_v0.2.pptx
@@ -11777,7 +11777,7 @@
                 </a:solidFill>
                 <a:latin typeface="Arial"/>
               </a:rPr>
-              <a:t>~4 minutes · standalone video · voice-over on text slides</a:t>
+              <a:t>standalone video · voice-over on text slides</a:t>
             </a:r>
           </a:p>
         </p:txBody>

--- a/10-Knowledge-Products/KP1-GEA/videos/module_3/en/decks/KP1_M3_3.5_Deck_v0.2.pptx
+++ b/10-Knowledge-Products/KP1-GEA/videos/module_3/en/decks/KP1_M3_3.5_Deck_v0.2.pptx
@@ -11641,7 +11641,7 @@
                 </a:solidFill>
                 <a:latin typeface="Arial"/>
               </a:rPr>
-              <a:t>KP1 · MODULE 3 · VIDEO 3.5</a:t>
+              <a:t>MODULE 3 · VIDEO 3.5</a:t>
             </a:r>
           </a:p>
         </p:txBody>
